--- a/LabBook_20.pptx
+++ b/LabBook_20.pptx
@@ -4135,18 +4135,11 @@
               </a:spcBef>
             </a:pPr>
             <a:r>
-              <a:rPr lang="es-ES" spc="165" dirty="0" err="1">
-                <a:latin typeface="Arial"/>
-                <a:cs typeface="Arial"/>
-              </a:rPr>
-              <a:t>Student</a:t>
-            </a:r>
-            <a:r>
               <a:rPr lang="es-ES" spc="165" dirty="0">
                 <a:latin typeface="Arial"/>
                 <a:cs typeface="Arial"/>
               </a:rPr>
-              <a:t>: </a:t>
+              <a:t>Student: Arnau Bernabeu Corbí</a:t>
             </a:r>
             <a:endParaRPr sz="1800" dirty="0">
               <a:latin typeface="Arial"/>
